--- a/courseware/Microsoft Azure Fundamentals (AZ-900)-v1.pptx
+++ b/courseware/Microsoft Azure Fundamentals (AZ-900)-v1.pptx
@@ -63860,7 +63860,7 @@
                 </a:solidFill>
                 <a:latin typeface="Arial"/>
               </a:rPr>
-              <a:t>Course Wrap-Up</a:t>
+              <a:t>Thank You - Course Wrap-Up</a:t>
             </a:r>
           </a:p>
         </p:txBody>
